--- a/docs/handover/SO-CHU-NHIEM-SO-GIOI-THIEU.pptx
+++ b/docs/handover/SO-CHU-NHIEM-SO-GIOI-THIEU.pptx
@@ -3219,7 +3219,7 @@
                   <a:srgbClr val="BFDBFE"/>
                 </a:solidFill>
               </a:rPr>
-              <a:t>https://sochunhiem.vieschool.com - Demo: *@demo.scn, mật khẩu demo1234</a:t>
+              <a:t>https://sochunhiem.vieschool.com - Demo: anhptl@nd.scn..., mật khẩu demo1234</a:t>
             </a:r>
           </a:p>
         </p:txBody>
@@ -4527,7 +4527,7 @@
                   <a:srgbClr val="D1D5DB"/>
                 </a:solidFill>
               </a:rPr>
-              <a:t>Tài khoản demo: bgh / pht / totruong / gvcn / gvbm / ketoan / phuhuynh / hocsinh / sogd / ubnd / admin @demo.scn - mật khẩu: demo1234</a:t>
+              <a:t>Tài khoản demo theo tên thật: hainv / duclm / hanhlth / anhptl / minhtv / trangpt / annv / baong @nd.scn; sovqt / daonvl / admin @demo.scn - mật khẩu: demo1234</a:t>
             </a:r>
           </a:p>
           <a:p>
